--- a/Documentation/Ai presentation.pptx
+++ b/Documentation/Ai presentation.pptx
@@ -111,6 +111,11 @@
       </a:defRPr>
     </a:lvl9pPr>
   </p:defaultTextStyle>
+  <p:extLst>
+    <p:ext uri="{EFAFB233-063F-42B5-8137-9DF3F51BA10A}">
+      <p15:sldGuideLst xmlns:p15="http://schemas.microsoft.com/office/powerpoint/2012/main"/>
+    </p:ext>
+  </p:extLst>
 </p:presentation>
 </file>
 
@@ -263,7 +268,7 @@
           <a:p>
             <a:fld id="{A921E220-0FE6-4AAF-A5BE-314878E9D89C}" type="datetimeFigureOut">
               <a:rPr lang="en-GB" smtClean="0"/>
-              <a:t>16/01/2025</a:t>
+              <a:t>17/01/2025</a:t>
             </a:fld>
             <a:endParaRPr lang="en-GB"/>
           </a:p>
@@ -463,7 +468,7 @@
           <a:p>
             <a:fld id="{A921E220-0FE6-4AAF-A5BE-314878E9D89C}" type="datetimeFigureOut">
               <a:rPr lang="en-GB" smtClean="0"/>
-              <a:t>16/01/2025</a:t>
+              <a:t>17/01/2025</a:t>
             </a:fld>
             <a:endParaRPr lang="en-GB"/>
           </a:p>
@@ -673,7 +678,7 @@
           <a:p>
             <a:fld id="{A921E220-0FE6-4AAF-A5BE-314878E9D89C}" type="datetimeFigureOut">
               <a:rPr lang="en-GB" smtClean="0"/>
-              <a:t>16/01/2025</a:t>
+              <a:t>17/01/2025</a:t>
             </a:fld>
             <a:endParaRPr lang="en-GB"/>
           </a:p>
@@ -873,7 +878,7 @@
           <a:p>
             <a:fld id="{A921E220-0FE6-4AAF-A5BE-314878E9D89C}" type="datetimeFigureOut">
               <a:rPr lang="en-GB" smtClean="0"/>
-              <a:t>16/01/2025</a:t>
+              <a:t>17/01/2025</a:t>
             </a:fld>
             <a:endParaRPr lang="en-GB"/>
           </a:p>
@@ -1149,7 +1154,7 @@
           <a:p>
             <a:fld id="{A921E220-0FE6-4AAF-A5BE-314878E9D89C}" type="datetimeFigureOut">
               <a:rPr lang="en-GB" smtClean="0"/>
-              <a:t>16/01/2025</a:t>
+              <a:t>17/01/2025</a:t>
             </a:fld>
             <a:endParaRPr lang="en-GB"/>
           </a:p>
@@ -1417,7 +1422,7 @@
           <a:p>
             <a:fld id="{A921E220-0FE6-4AAF-A5BE-314878E9D89C}" type="datetimeFigureOut">
               <a:rPr lang="en-GB" smtClean="0"/>
-              <a:t>16/01/2025</a:t>
+              <a:t>17/01/2025</a:t>
             </a:fld>
             <a:endParaRPr lang="en-GB"/>
           </a:p>
@@ -1832,7 +1837,7 @@
           <a:p>
             <a:fld id="{A921E220-0FE6-4AAF-A5BE-314878E9D89C}" type="datetimeFigureOut">
               <a:rPr lang="en-GB" smtClean="0"/>
-              <a:t>16/01/2025</a:t>
+              <a:t>17/01/2025</a:t>
             </a:fld>
             <a:endParaRPr lang="en-GB"/>
           </a:p>
@@ -1974,7 +1979,7 @@
           <a:p>
             <a:fld id="{A921E220-0FE6-4AAF-A5BE-314878E9D89C}" type="datetimeFigureOut">
               <a:rPr lang="en-GB" smtClean="0"/>
-              <a:t>16/01/2025</a:t>
+              <a:t>17/01/2025</a:t>
             </a:fld>
             <a:endParaRPr lang="en-GB"/>
           </a:p>
@@ -2087,7 +2092,7 @@
           <a:p>
             <a:fld id="{A921E220-0FE6-4AAF-A5BE-314878E9D89C}" type="datetimeFigureOut">
               <a:rPr lang="en-GB" smtClean="0"/>
-              <a:t>16/01/2025</a:t>
+              <a:t>17/01/2025</a:t>
             </a:fld>
             <a:endParaRPr lang="en-GB"/>
           </a:p>
@@ -2400,7 +2405,7 @@
           <a:p>
             <a:fld id="{A921E220-0FE6-4AAF-A5BE-314878E9D89C}" type="datetimeFigureOut">
               <a:rPr lang="en-GB" smtClean="0"/>
-              <a:t>16/01/2025</a:t>
+              <a:t>17/01/2025</a:t>
             </a:fld>
             <a:endParaRPr lang="en-GB"/>
           </a:p>
@@ -2689,7 +2694,7 @@
           <a:p>
             <a:fld id="{A921E220-0FE6-4AAF-A5BE-314878E9D89C}" type="datetimeFigureOut">
               <a:rPr lang="en-GB" smtClean="0"/>
-              <a:t>16/01/2025</a:t>
+              <a:t>17/01/2025</a:t>
             </a:fld>
             <a:endParaRPr lang="en-GB"/>
           </a:p>
@@ -2932,7 +2937,7 @@
           <a:p>
             <a:fld id="{A921E220-0FE6-4AAF-A5BE-314878E9D89C}" type="datetimeFigureOut">
               <a:rPr lang="en-GB" smtClean="0"/>
-              <a:t>16/01/2025</a:t>
+              <a:t>17/01/2025</a:t>
             </a:fld>
             <a:endParaRPr lang="en-GB"/>
           </a:p>
@@ -4043,13 +4048,13 @@
   <p:clrMapOvr>
     <a:masterClrMapping/>
   </p:clrMapOvr>
-  <mc:AlternateContent xmlns:mc="http://schemas.openxmlformats.org/markup-compatibility/2006">
-    <mc:Choice xmlns:p159="http://schemas.microsoft.com/office/powerpoint/2015/09/main" Requires="p159">
+  <mc:AlternateContent xmlns:mc="http://schemas.openxmlformats.org/markup-compatibility/2006" xmlns:p159="http://schemas.microsoft.com/office/powerpoint/2015/09/main">
+    <mc:Choice Requires="p159">
       <p:transition xmlns:p14="http://schemas.microsoft.com/office/powerpoint/2010/main" spd="slow" p14:dur="2000">
         <p159:morph option="byObject"/>
       </p:transition>
     </mc:Choice>
-    <mc:Fallback>
+    <mc:Fallback xmlns="">
       <p:transition spd="slow">
         <p:fade/>
       </p:transition>
@@ -5097,13 +5102,13 @@
   <p:clrMapOvr>
     <a:masterClrMapping/>
   </p:clrMapOvr>
-  <mc:AlternateContent xmlns:mc="http://schemas.openxmlformats.org/markup-compatibility/2006">
-    <mc:Choice xmlns:p159="http://schemas.microsoft.com/office/powerpoint/2015/09/main" Requires="p159">
+  <mc:AlternateContent xmlns:mc="http://schemas.openxmlformats.org/markup-compatibility/2006" xmlns:p159="http://schemas.microsoft.com/office/powerpoint/2015/09/main">
+    <mc:Choice Requires="p159">
       <p:transition xmlns:p14="http://schemas.microsoft.com/office/powerpoint/2010/main" spd="slow" p14:dur="2000">
         <p159:morph option="byObject"/>
       </p:transition>
     </mc:Choice>
-    <mc:Fallback>
+    <mc:Fallback xmlns="">
       <p:transition spd="slow">
         <p:fade/>
       </p:transition>
@@ -5867,13 +5872,13 @@
   <p:clrMapOvr>
     <a:masterClrMapping/>
   </p:clrMapOvr>
-  <mc:AlternateContent xmlns:mc="http://schemas.openxmlformats.org/markup-compatibility/2006">
-    <mc:Choice xmlns:p159="http://schemas.microsoft.com/office/powerpoint/2015/09/main" Requires="p159">
+  <mc:AlternateContent xmlns:mc="http://schemas.openxmlformats.org/markup-compatibility/2006" xmlns:p159="http://schemas.microsoft.com/office/powerpoint/2015/09/main">
+    <mc:Choice Requires="p159">
       <p:transition xmlns:p14="http://schemas.microsoft.com/office/powerpoint/2010/main" spd="slow" p14:dur="2000">
         <p159:morph option="byObject"/>
       </p:transition>
     </mc:Choice>
-    <mc:Fallback>
+    <mc:Fallback xmlns="">
       <p:transition spd="slow">
         <p:fade/>
       </p:transition>
@@ -6752,13 +6757,13 @@
   <p:clrMapOvr>
     <a:masterClrMapping/>
   </p:clrMapOvr>
-  <mc:AlternateContent xmlns:mc="http://schemas.openxmlformats.org/markup-compatibility/2006">
-    <mc:Choice xmlns:p159="http://schemas.microsoft.com/office/powerpoint/2015/09/main" Requires="p159">
+  <mc:AlternateContent xmlns:mc="http://schemas.openxmlformats.org/markup-compatibility/2006" xmlns:p159="http://schemas.microsoft.com/office/powerpoint/2015/09/main">
+    <mc:Choice Requires="p159">
       <p:transition xmlns:p14="http://schemas.microsoft.com/office/powerpoint/2010/main" spd="slow" p14:dur="2000">
         <p159:morph option="byObject"/>
       </p:transition>
     </mc:Choice>
-    <mc:Fallback>
+    <mc:Fallback xmlns="">
       <p:transition spd="slow">
         <p:fade/>
       </p:transition>
@@ -7589,36 +7594,6 @@
           </a:p>
         </p:txBody>
       </p:sp>
-      <p:pic>
-        <p:nvPicPr>
-          <p:cNvPr id="5" name="Picture 4">
-            <a:extLst>
-              <a:ext uri="{FF2B5EF4-FFF2-40B4-BE49-F238E27FC236}">
-                <a16:creationId xmlns:a16="http://schemas.microsoft.com/office/drawing/2014/main" id="{E5743131-F65D-815B-488E-EAF4447E53BF}"/>
-              </a:ext>
-            </a:extLst>
-          </p:cNvPr>
-          <p:cNvPicPr>
-            <a:picLocks noChangeAspect="1"/>
-          </p:cNvPicPr>
-          <p:nvPr/>
-        </p:nvPicPr>
-        <p:blipFill>
-          <a:blip r:embed="rId2"/>
-          <a:stretch>
-            <a:fillRect/>
-          </a:stretch>
-        </p:blipFill>
-        <p:spPr>
-          <a:xfrm>
-            <a:off x="6128248" y="1150620"/>
-            <a:ext cx="6075679" cy="4556759"/>
-          </a:xfrm>
-          <a:prstGeom prst="rect">
-            <a:avLst/>
-          </a:prstGeom>
-        </p:spPr>
-      </p:pic>
       <p:sp>
         <p:nvSpPr>
           <p:cNvPr id="4" name="TextBox 3">
@@ -7659,6 +7634,42 @@
           </a:p>
         </p:txBody>
       </p:sp>
+      <p:pic>
+        <p:nvPicPr>
+          <p:cNvPr id="7" name="Picture 6" descr="A graph with a line and a red line&#10;&#10;Description automatically generated">
+            <a:extLst>
+              <a:ext uri="{FF2B5EF4-FFF2-40B4-BE49-F238E27FC236}">
+                <a16:creationId xmlns:a16="http://schemas.microsoft.com/office/drawing/2014/main" id="{C9FF723C-E31E-0D5D-1778-7E5139FF07F9}"/>
+              </a:ext>
+            </a:extLst>
+          </p:cNvPr>
+          <p:cNvPicPr>
+            <a:picLocks noChangeAspect="1"/>
+          </p:cNvPicPr>
+          <p:nvPr/>
+        </p:nvPicPr>
+        <p:blipFill>
+          <a:blip r:embed="rId2">
+            <a:extLst>
+              <a:ext uri="{28A0092B-C50C-407E-A947-70E740481C1C}">
+                <a14:useLocalDpi xmlns:a14="http://schemas.microsoft.com/office/drawing/2010/main" val="0"/>
+              </a:ext>
+            </a:extLst>
+          </a:blip>
+          <a:stretch>
+            <a:fillRect/>
+          </a:stretch>
+        </p:blipFill>
+        <p:spPr>
+          <a:xfrm>
+            <a:off x="6520952" y="1676223"/>
+            <a:ext cx="5682975" cy="4262231"/>
+          </a:xfrm>
+          <a:prstGeom prst="rect">
+            <a:avLst/>
+          </a:prstGeom>
+        </p:spPr>
+      </p:pic>
     </p:spTree>
     <p:extLst>
       <p:ext uri="{BB962C8B-B14F-4D97-AF65-F5344CB8AC3E}">
@@ -7669,13 +7680,13 @@
   <p:clrMapOvr>
     <a:masterClrMapping/>
   </p:clrMapOvr>
-  <mc:AlternateContent xmlns:mc="http://schemas.openxmlformats.org/markup-compatibility/2006">
-    <mc:Choice xmlns:p159="http://schemas.microsoft.com/office/powerpoint/2015/09/main" Requires="p159">
+  <mc:AlternateContent xmlns:mc="http://schemas.openxmlformats.org/markup-compatibility/2006" xmlns:p159="http://schemas.microsoft.com/office/powerpoint/2015/09/main">
+    <mc:Choice Requires="p159">
       <p:transition xmlns:p14="http://schemas.microsoft.com/office/powerpoint/2010/main" spd="slow" p14:dur="2000">
         <p159:morph option="byObject"/>
       </p:transition>
     </mc:Choice>
-    <mc:Fallback>
+    <mc:Fallback xmlns="">
       <p:transition spd="slow">
         <p:fade/>
       </p:transition>
@@ -8435,13 +8446,13 @@
   <p:clrMapOvr>
     <a:masterClrMapping/>
   </p:clrMapOvr>
-  <mc:AlternateContent xmlns:mc="http://schemas.openxmlformats.org/markup-compatibility/2006">
-    <mc:Choice xmlns:p159="http://schemas.microsoft.com/office/powerpoint/2015/09/main" Requires="p159">
+  <mc:AlternateContent xmlns:mc="http://schemas.openxmlformats.org/markup-compatibility/2006" xmlns:p159="http://schemas.microsoft.com/office/powerpoint/2015/09/main">
+    <mc:Choice Requires="p159">
       <p:transition xmlns:p14="http://schemas.microsoft.com/office/powerpoint/2010/main" spd="slow" p14:dur="2000">
         <p159:morph option="byObject"/>
       </p:transition>
     </mc:Choice>
-    <mc:Fallback>
+    <mc:Fallback xmlns="">
       <p:transition spd="slow">
         <p:fade/>
       </p:transition>
@@ -8942,13 +8953,13 @@
   <p:clrMapOvr>
     <a:masterClrMapping/>
   </p:clrMapOvr>
-  <mc:AlternateContent xmlns:mc="http://schemas.openxmlformats.org/markup-compatibility/2006">
-    <mc:Choice xmlns:p159="http://schemas.microsoft.com/office/powerpoint/2015/09/main" Requires="p159">
+  <mc:AlternateContent xmlns:mc="http://schemas.openxmlformats.org/markup-compatibility/2006" xmlns:p159="http://schemas.microsoft.com/office/powerpoint/2015/09/main">
+    <mc:Choice Requires="p159">
       <p:transition xmlns:p14="http://schemas.microsoft.com/office/powerpoint/2010/main" spd="slow" p14:dur="2000">
         <p159:morph option="byObject"/>
       </p:transition>
     </mc:Choice>
-    <mc:Fallback>
+    <mc:Fallback xmlns="">
       <p:transition spd="slow">
         <p:fade/>
       </p:transition>
@@ -9730,13 +9741,13 @@
   <p:clrMapOvr>
     <a:masterClrMapping/>
   </p:clrMapOvr>
-  <mc:AlternateContent xmlns:mc="http://schemas.openxmlformats.org/markup-compatibility/2006">
-    <mc:Choice xmlns:p159="http://schemas.microsoft.com/office/powerpoint/2015/09/main" Requires="p159">
+  <mc:AlternateContent xmlns:mc="http://schemas.openxmlformats.org/markup-compatibility/2006" xmlns:p159="http://schemas.microsoft.com/office/powerpoint/2015/09/main">
+    <mc:Choice Requires="p159">
       <p:transition xmlns:p14="http://schemas.microsoft.com/office/powerpoint/2010/main" spd="slow" p14:dur="2000">
         <p159:morph option="byObject"/>
       </p:transition>
     </mc:Choice>
-    <mc:Fallback>
+    <mc:Fallback xmlns="">
       <p:transition spd="slow">
         <p:fade/>
       </p:transition>
